--- a/dist/초4/수학/수와연산/초4_수학_수와연산_04_세자리수÷두자리수_학생용.pptx
+++ b/dist/초4/수학/수와연산/초4_수학_수와연산_04_세자리수÷두자리수_학생용.pptx
@@ -119,13 +119,13 @@
   <p:extLst>
     <p:ext uri="{521415D9-36F7-43E2-AB2F-B90AF26B5E84}">
       <p14:sectionLst xmlns:p14="http://schemas.microsoft.com/office/powerpoint/2010/main">
-        <p14:section name="도입" id="{3632ab8f-84d0-edf5-7f4b-14ff72fa987c}">
+        <p14:section name="도입" id="{3e0c4e75-08ce-2c94-d747-7f8de25a2157}">
           <p14:sldIdLst>
             <p14:sldId id="256"/>
             <p14:sldId id="257"/>
           </p14:sldIdLst>
         </p14:section>
-        <p14:section name="개념" id="{8a603964-51a1-ceef-7cd3-7ad0344a8462}">
+        <p14:section name="개념" id="{5444eea6-7541-13a7-c6ce-85823dcd70d1}">
           <p14:sldIdLst>
             <p14:sldId id="258"/>
             <p14:sldId id="259"/>
@@ -134,33 +134,33 @@
             <p14:sldId id="264"/>
           </p14:sldIdLst>
         </p14:section>
-        <p14:section name="연습" id="{bdbddbd4-737a-c6f8-43c3-cf503054f129}">
+        <p14:section name="연습" id="{c813c50e-4f3f-0e80-50ef-7e4b5fdcbbf2}">
           <p14:sldIdLst>
             <p14:sldId id="260"/>
             <p14:sldId id="263"/>
           </p14:sldIdLst>
         </p14:section>
-        <p14:section name="개념" id="{3d97c059-45f4-a916-9072-e1b3fd2a02c8}">
+        <p14:section name="개념" id="{66504819-ed39-5105-1e53-2d1aeffc21e6}">
           <p14:sldIdLst/>
         </p14:section>
-        <p14:section name="연습" id="{14c1a0cb-8dc1-ae16-0a5d-93b1accb25e3}">
+        <p14:section name="연습" id="{7d58cf73-5b9f-41a4-bce1-eb39fb49977c}">
           <p14:sldIdLst/>
         </p14:section>
-        <p14:section name="개념" id="{48564ae7-c173-8eb7-9cb1-d2c378a14e11}">
+        <p14:section name="개념" id="{c01e67a1-4174-de1e-961e-117a8443d9f5}">
           <p14:sldIdLst/>
         </p14:section>
-        <p14:section name="확인" id="{cf53009b-6af3-923a-f402-b5c1bef61ee2}">
+        <p14:section name="확인" id="{38e06c18-1a07-4ae3-4e67-d0da8b5191cf}">
           <p14:sldIdLst>
             <p14:sldId id="265"/>
             <p14:sldId id="266"/>
           </p14:sldIdLst>
         </p14:section>
-        <p14:section name="정리" id="{413b3038-52f7-2ff7-72a7-3bd36e981e21}">
+        <p14:section name="정리" id="{8f204754-67d5-e799-0eff-592ab1d96230}">
           <p14:sldIdLst>
             <p14:sldId id="267"/>
           </p14:sldIdLst>
         </p14:section>
-        <p14:section name="보충" id="{c7d6d63f-f97f-6aab-bdf5-c1e0761a9c1a}">
+        <p14:section name="보충" id="{2d0902f1-4570-e98d-a44b-70817823898e}">
           <p14:sldIdLst>
             <p14:sldId id="268"/>
           </p14:sldIdLst>
